--- a/AI_Evolution_Presentation.pptx
+++ b/AI_Evolution_Presentation.pptx
@@ -2781,7 +2781,7 @@
         <p:spPr>
           <a:xfrm>
             <a:off x="457200" y="1965960"/>
-            <a:ext cx="2743200" cy="365760"/>
+            <a:ext cx="4023360" cy="347472"/>
           </a:xfrm>
           <a:prstGeom prst="rect">
             <a:avLst/>
@@ -2797,7 +2797,7 @@
               <a:buNone/>
             </a:pPr>
             <a:r>
-              <a:rPr lang="en-US" sz="1600" b="1" dirty="0">
+              <a:rPr lang="en-US" sz="1500" b="1" dirty="0">
                 <a:solidFill>
                   <a:srgbClr val="0F172A"/>
                 </a:solidFill>
@@ -2807,7 +2807,7 @@
               </a:rPr>
               <a:t>Key Concepts</a:t>
             </a:r>
-            <a:endParaRPr lang="en-US" sz="1600" dirty="0"/>
+            <a:endParaRPr lang="en-US" sz="1500" dirty="0"/>
           </a:p>
         </p:txBody>
       </p:sp>
@@ -2820,7 +2820,7 @@
         <p:spPr>
           <a:xfrm>
             <a:off x="457200" y="2331720"/>
-            <a:ext cx="8229600" cy="2011680"/>
+            <a:ext cx="4069080" cy="2011680"/>
           </a:xfrm>
           <a:prstGeom prst="rect">
             <a:avLst/>
@@ -2834,13 +2834,13 @@
           <a:p>
             <a:pPr marL="342900" indent="-342900">
               <a:spcAft>
-                <a:spcPts val="600"/>
+                <a:spcPts val="800"/>
               </a:spcAft>
               <a:buSzPct val="100000"/>
               <a:buChar char="●"/>
             </a:pPr>
             <a:r>
-              <a:rPr lang="en-US" sz="1300" dirty="0">
+              <a:rPr lang="en-US" sz="1200" dirty="0">
                 <a:solidFill>
                   <a:srgbClr val="1E293B"/>
                 </a:solidFill>
@@ -2850,18 +2850,18 @@
               </a:rPr>
               <a:t>Orchestrator: Manager delegates to specialist agents</a:t>
             </a:r>
-            <a:endParaRPr lang="en-US" sz="1300" dirty="0"/>
+            <a:endParaRPr lang="en-US" sz="1200" dirty="0"/>
           </a:p>
           <a:p>
             <a:pPr marL="342900" indent="-342900">
               <a:spcAft>
-                <a:spcPts val="600"/>
+                <a:spcPts val="800"/>
               </a:spcAft>
               <a:buSzPct val="100000"/>
               <a:buChar char="●"/>
             </a:pPr>
             <a:r>
-              <a:rPr lang="en-US" sz="1300" dirty="0">
+              <a:rPr lang="en-US" sz="1200" dirty="0">
                 <a:solidFill>
                   <a:srgbClr val="1E293B"/>
                 </a:solidFill>
@@ -2871,18 +2871,18 @@
               </a:rPr>
               <a:t>Pipeline: Sequential handoff (plan → code → review)</a:t>
             </a:r>
-            <a:endParaRPr lang="en-US" sz="1300" dirty="0"/>
+            <a:endParaRPr lang="en-US" sz="1200" dirty="0"/>
           </a:p>
           <a:p>
             <a:pPr marL="342900" indent="-342900">
               <a:spcAft>
-                <a:spcPts val="600"/>
+                <a:spcPts val="800"/>
               </a:spcAft>
               <a:buSzPct val="100000"/>
               <a:buChar char="●"/>
             </a:pPr>
             <a:r>
-              <a:rPr lang="en-US" sz="1300" dirty="0">
+              <a:rPr lang="en-US" sz="1200" dirty="0">
                 <a:solidFill>
                   <a:srgbClr val="1E293B"/>
                 </a:solidFill>
@@ -2892,18 +2892,18 @@
               </a:rPr>
               <a:t>Debate: Adversarial collaboration for quality</a:t>
             </a:r>
-            <a:endParaRPr lang="en-US" sz="1300" dirty="0"/>
+            <a:endParaRPr lang="en-US" sz="1200" dirty="0"/>
           </a:p>
           <a:p>
             <a:pPr marL="342900" indent="-342900">
               <a:spcAft>
-                <a:spcPts val="600"/>
+                <a:spcPts val="800"/>
               </a:spcAft>
               <a:buSzPct val="100000"/>
               <a:buChar char="●"/>
             </a:pPr>
             <a:r>
-              <a:rPr lang="en-US" sz="1300" dirty="0">
+              <a:rPr lang="en-US" sz="1200" dirty="0">
                 <a:solidFill>
                   <a:srgbClr val="1E293B"/>
                 </a:solidFill>
@@ -2913,7 +2913,7 @@
               </a:rPr>
               <a:t>Swarm: Dynamic routing to the right expert</a:t>
             </a:r>
-            <a:endParaRPr lang="en-US" sz="1300" dirty="0"/>
+            <a:endParaRPr lang="en-US" sz="1200" dirty="0"/>
           </a:p>
         </p:txBody>
       </p:sp>
@@ -2925,16 +2925,23 @@
         </p:nvSpPr>
         <p:spPr>
           <a:xfrm>
-            <a:off x="457200" y="4434840"/>
-            <a:ext cx="8229600" cy="502920"/>
-          </a:xfrm>
-          <a:prstGeom prst="rect">
-            <a:avLst/>
-          </a:prstGeom>
-          <a:solidFill>
-            <a:srgbClr val="F0FDF4"/>
-          </a:solidFill>
-          <a:ln/>
+            <a:off x="4663440" y="1920240"/>
+            <a:ext cx="4160520" cy="2468880"/>
+          </a:xfrm>
+          <a:prstGeom prst="rect">
+            <a:avLst/>
+          </a:prstGeom>
+          <a:solidFill>
+            <a:srgbClr val="FFFFFF"/>
+          </a:solidFill>
+          <a:ln/>
+          <a:effectLst>
+            <a:outerShdw sx="100000" sy="100000" kx="0" ky="0" algn="bl" rotWithShape="0" blurRad="76200" dist="25400" dir="8100000">
+              <a:srgbClr val="000000">
+                <a:alpha val="12000"/>
+              </a:srgbClr>
+            </a:outerShdw>
+          </a:effectLst>
         </p:spPr>
       </p:sp>
       <p:sp>
@@ -2945,14 +2952,14 @@
         </p:nvSpPr>
         <p:spPr>
           <a:xfrm>
-            <a:off x="457200" y="4434840"/>
-            <a:ext cx="54864" cy="502920"/>
-          </a:xfrm>
-          <a:prstGeom prst="rect">
-            <a:avLst/>
-          </a:prstGeom>
-          <a:solidFill>
-            <a:srgbClr val="10B981"/>
+            <a:off x="4663440" y="1920240"/>
+            <a:ext cx="4160520" cy="45720"/>
+          </a:xfrm>
+          <a:prstGeom prst="rect">
+            <a:avLst/>
+          </a:prstGeom>
+          <a:solidFill>
+            <a:srgbClr val="06B6D4"/>
           </a:solidFill>
           <a:ln/>
         </p:spPr>
@@ -2967,6 +2974,69 @@
         </p:nvPicPr>
         <p:blipFill>
           <a:blip r:embed="rId3"/>
+          <a:srcRect l="0" r="0" t="0" b="0"/>
+          <a:stretch/>
+        </p:blipFill>
+        <p:spPr>
+          <a:xfrm>
+            <a:off x="4754880" y="2029968"/>
+            <a:ext cx="3977640" cy="2249424"/>
+          </a:xfrm>
+          <a:prstGeom prst="rect">
+            <a:avLst/>
+          </a:prstGeom>
+        </p:spPr>
+      </p:pic>
+      <p:sp>
+        <p:nvSpPr>
+          <p:cNvPr id="18" name="Shape 13"/>
+          <p:cNvSpPr/>
+          <p:nvPr/>
+        </p:nvSpPr>
+        <p:spPr>
+          <a:xfrm>
+            <a:off x="457200" y="4434840"/>
+            <a:ext cx="8229600" cy="502920"/>
+          </a:xfrm>
+          <a:prstGeom prst="rect">
+            <a:avLst/>
+          </a:prstGeom>
+          <a:solidFill>
+            <a:srgbClr val="F0FDF4"/>
+          </a:solidFill>
+          <a:ln/>
+        </p:spPr>
+      </p:sp>
+      <p:sp>
+        <p:nvSpPr>
+          <p:cNvPr id="19" name="Shape 14"/>
+          <p:cNvSpPr/>
+          <p:nvPr/>
+        </p:nvSpPr>
+        <p:spPr>
+          <a:xfrm>
+            <a:off x="457200" y="4434840"/>
+            <a:ext cx="54864" cy="502920"/>
+          </a:xfrm>
+          <a:prstGeom prst="rect">
+            <a:avLst/>
+          </a:prstGeom>
+          <a:solidFill>
+            <a:srgbClr val="10B981"/>
+          </a:solidFill>
+          <a:ln/>
+        </p:spPr>
+      </p:sp>
+      <p:pic>
+        <p:nvPicPr>
+          <p:cNvPr id="20" name="Image 3" descr="preencoded.png">    </p:cNvPr>
+          <p:cNvPicPr>
+            <a:picLocks noChangeAspect="1"/>
+          </p:cNvPicPr>
+          <p:nvPr/>
+        </p:nvPicPr>
+        <p:blipFill>
+          <a:blip r:embed="rId4"/>
           <a:stretch>
             <a:fillRect/>
           </a:stretch>
@@ -2983,7 +3053,7 @@
       </p:pic>
       <p:sp>
         <p:nvSpPr>
-          <p:cNvPr id="18" name="Text 13"/>
+          <p:cNvPr id="21" name="Text 15"/>
           <p:cNvSpPr/>
           <p:nvPr/>
         </p:nvSpPr>
@@ -3368,7 +3438,7 @@
         <p:spPr>
           <a:xfrm>
             <a:off x="457200" y="1965960"/>
-            <a:ext cx="2743200" cy="365760"/>
+            <a:ext cx="4023360" cy="347472"/>
           </a:xfrm>
           <a:prstGeom prst="rect">
             <a:avLst/>
@@ -3384,7 +3454,7 @@
               <a:buNone/>
             </a:pPr>
             <a:r>
-              <a:rPr lang="en-US" sz="1600" b="1" dirty="0">
+              <a:rPr lang="en-US" sz="1500" b="1" dirty="0">
                 <a:solidFill>
                   <a:srgbClr val="0F172A"/>
                 </a:solidFill>
@@ -3394,7 +3464,7 @@
               </a:rPr>
               <a:t>Key Concepts</a:t>
             </a:r>
-            <a:endParaRPr lang="en-US" sz="1600" dirty="0"/>
+            <a:endParaRPr lang="en-US" sz="1500" dirty="0"/>
           </a:p>
         </p:txBody>
       </p:sp>
@@ -3407,7 +3477,7 @@
         <p:spPr>
           <a:xfrm>
             <a:off x="457200" y="2331720"/>
-            <a:ext cx="8229600" cy="2011680"/>
+            <a:ext cx="4069080" cy="2011680"/>
           </a:xfrm>
           <a:prstGeom prst="rect">
             <a:avLst/>
@@ -3421,13 +3491,13 @@
           <a:p>
             <a:pPr marL="342900" indent="-342900">
               <a:spcAft>
-                <a:spcPts val="600"/>
+                <a:spcPts val="800"/>
               </a:spcAft>
               <a:buSzPct val="100000"/>
               <a:buChar char="●"/>
             </a:pPr>
             <a:r>
-              <a:rPr lang="en-US" sz="1300" dirty="0">
+              <a:rPr lang="en-US" sz="1200" dirty="0">
                 <a:solidFill>
                   <a:srgbClr val="1E293B"/>
                 </a:solidFill>
@@ -3437,18 +3507,18 @@
               </a:rPr>
               <a:t>Curate the ENTIRE context window, not just the prompt</a:t>
             </a:r>
-            <a:endParaRPr lang="en-US" sz="1300" dirty="0"/>
+            <a:endParaRPr lang="en-US" sz="1200" dirty="0"/>
           </a:p>
           <a:p>
             <a:pPr marL="342900" indent="-342900">
               <a:spcAft>
-                <a:spcPts val="600"/>
+                <a:spcPts val="800"/>
               </a:spcAft>
               <a:buSzPct val="100000"/>
               <a:buChar char="●"/>
             </a:pPr>
             <a:r>
-              <a:rPr lang="en-US" sz="1300" dirty="0">
+              <a:rPr lang="en-US" sz="1200" dirty="0">
                 <a:solidFill>
                   <a:srgbClr val="1E293B"/>
                 </a:solidFill>
@@ -3458,18 +3528,18 @@
               </a:rPr>
               <a:t>Summarize old history, keep recent turns detailed</a:t>
             </a:r>
-            <a:endParaRPr lang="en-US" sz="1300" dirty="0"/>
+            <a:endParaRPr lang="en-US" sz="1200" dirty="0"/>
           </a:p>
           <a:p>
             <a:pPr marL="342900" indent="-342900">
               <a:spcAft>
-                <a:spcPts val="600"/>
+                <a:spcPts val="800"/>
               </a:spcAft>
               <a:buSzPct val="100000"/>
               <a:buChar char="●"/>
             </a:pPr>
             <a:r>
-              <a:rPr lang="en-US" sz="1300" dirty="0">
+              <a:rPr lang="en-US" sz="1200" dirty="0">
                 <a:solidFill>
                   <a:srgbClr val="1E293B"/>
                 </a:solidFill>
@@ -3479,18 +3549,18 @@
               </a:rPr>
               <a:t>Priority-based: P1 system+query, P2 code+docs, P3 prefs, P4 drop</a:t>
             </a:r>
-            <a:endParaRPr lang="en-US" sz="1300" dirty="0"/>
+            <a:endParaRPr lang="en-US" sz="1200" dirty="0"/>
           </a:p>
           <a:p>
             <a:pPr marL="342900" indent="-342900">
               <a:spcAft>
-                <a:spcPts val="600"/>
+                <a:spcPts val="800"/>
               </a:spcAft>
               <a:buSzPct val="100000"/>
               <a:buChar char="●"/>
             </a:pPr>
             <a:r>
-              <a:rPr lang="en-US" sz="1300" dirty="0">
+              <a:rPr lang="en-US" sz="1200" dirty="0">
                 <a:solidFill>
                   <a:srgbClr val="1E293B"/>
                 </a:solidFill>
@@ -3500,7 +3570,7 @@
               </a:rPr>
               <a:t>Dynamic selection: different queries need different context</a:t>
             </a:r>
-            <a:endParaRPr lang="en-US" sz="1300" dirty="0"/>
+            <a:endParaRPr lang="en-US" sz="1200" dirty="0"/>
           </a:p>
         </p:txBody>
       </p:sp>
@@ -3512,16 +3582,23 @@
         </p:nvSpPr>
         <p:spPr>
           <a:xfrm>
-            <a:off x="457200" y="4434840"/>
-            <a:ext cx="8229600" cy="502920"/>
-          </a:xfrm>
-          <a:prstGeom prst="rect">
-            <a:avLst/>
-          </a:prstGeom>
-          <a:solidFill>
-            <a:srgbClr val="F0FDF4"/>
-          </a:solidFill>
-          <a:ln/>
+            <a:off x="4663440" y="1920240"/>
+            <a:ext cx="4160520" cy="2468880"/>
+          </a:xfrm>
+          <a:prstGeom prst="rect">
+            <a:avLst/>
+          </a:prstGeom>
+          <a:solidFill>
+            <a:srgbClr val="FFFFFF"/>
+          </a:solidFill>
+          <a:ln/>
+          <a:effectLst>
+            <a:outerShdw sx="100000" sy="100000" kx="0" ky="0" algn="bl" rotWithShape="0" blurRad="76200" dist="25400" dir="8100000">
+              <a:srgbClr val="000000">
+                <a:alpha val="12000"/>
+              </a:srgbClr>
+            </a:outerShdw>
+          </a:effectLst>
         </p:spPr>
       </p:sp>
       <p:sp>
@@ -3532,14 +3609,14 @@
         </p:nvSpPr>
         <p:spPr>
           <a:xfrm>
-            <a:off x="457200" y="4434840"/>
-            <a:ext cx="54864" cy="502920"/>
-          </a:xfrm>
-          <a:prstGeom prst="rect">
-            <a:avLst/>
-          </a:prstGeom>
-          <a:solidFill>
-            <a:srgbClr val="10B981"/>
+            <a:off x="4663440" y="1920240"/>
+            <a:ext cx="4160520" cy="45720"/>
+          </a:xfrm>
+          <a:prstGeom prst="rect">
+            <a:avLst/>
+          </a:prstGeom>
+          <a:solidFill>
+            <a:srgbClr val="06B6D4"/>
           </a:solidFill>
           <a:ln/>
         </p:spPr>
@@ -3554,6 +3631,69 @@
         </p:nvPicPr>
         <p:blipFill>
           <a:blip r:embed="rId3"/>
+          <a:srcRect l="0" r="0" t="0" b="0"/>
+          <a:stretch/>
+        </p:blipFill>
+        <p:spPr>
+          <a:xfrm>
+            <a:off x="4754880" y="2029968"/>
+            <a:ext cx="3977640" cy="2249424"/>
+          </a:xfrm>
+          <a:prstGeom prst="rect">
+            <a:avLst/>
+          </a:prstGeom>
+        </p:spPr>
+      </p:pic>
+      <p:sp>
+        <p:nvSpPr>
+          <p:cNvPr id="18" name="Shape 13"/>
+          <p:cNvSpPr/>
+          <p:nvPr/>
+        </p:nvSpPr>
+        <p:spPr>
+          <a:xfrm>
+            <a:off x="457200" y="4434840"/>
+            <a:ext cx="8229600" cy="502920"/>
+          </a:xfrm>
+          <a:prstGeom prst="rect">
+            <a:avLst/>
+          </a:prstGeom>
+          <a:solidFill>
+            <a:srgbClr val="F0FDF4"/>
+          </a:solidFill>
+          <a:ln/>
+        </p:spPr>
+      </p:sp>
+      <p:sp>
+        <p:nvSpPr>
+          <p:cNvPr id="19" name="Shape 14"/>
+          <p:cNvSpPr/>
+          <p:nvPr/>
+        </p:nvSpPr>
+        <p:spPr>
+          <a:xfrm>
+            <a:off x="457200" y="4434840"/>
+            <a:ext cx="54864" cy="502920"/>
+          </a:xfrm>
+          <a:prstGeom prst="rect">
+            <a:avLst/>
+          </a:prstGeom>
+          <a:solidFill>
+            <a:srgbClr val="10B981"/>
+          </a:solidFill>
+          <a:ln/>
+        </p:spPr>
+      </p:sp>
+      <p:pic>
+        <p:nvPicPr>
+          <p:cNvPr id="20" name="Image 3" descr="preencoded.png">    </p:cNvPr>
+          <p:cNvPicPr>
+            <a:picLocks noChangeAspect="1"/>
+          </p:cNvPicPr>
+          <p:nvPr/>
+        </p:nvPicPr>
+        <p:blipFill>
+          <a:blip r:embed="rId4"/>
           <a:stretch>
             <a:fillRect/>
           </a:stretch>
@@ -3570,7 +3710,7 @@
       </p:pic>
       <p:sp>
         <p:nvSpPr>
-          <p:cNvPr id="18" name="Text 13"/>
+          <p:cNvPr id="21" name="Text 15"/>
           <p:cNvSpPr/>
           <p:nvPr/>
         </p:nvSpPr>
@@ -3955,7 +4095,7 @@
         <p:spPr>
           <a:xfrm>
             <a:off x="457200" y="1965960"/>
-            <a:ext cx="2743200" cy="365760"/>
+            <a:ext cx="4023360" cy="347472"/>
           </a:xfrm>
           <a:prstGeom prst="rect">
             <a:avLst/>
@@ -3971,7 +4111,7 @@
               <a:buNone/>
             </a:pPr>
             <a:r>
-              <a:rPr lang="en-US" sz="1600" b="1" dirty="0">
+              <a:rPr lang="en-US" sz="1500" b="1" dirty="0">
                 <a:solidFill>
                   <a:srgbClr val="0F172A"/>
                 </a:solidFill>
@@ -3981,7 +4121,7 @@
               </a:rPr>
               <a:t>Key Concepts</a:t>
             </a:r>
-            <a:endParaRPr lang="en-US" sz="1600" dirty="0"/>
+            <a:endParaRPr lang="en-US" sz="1500" dirty="0"/>
           </a:p>
         </p:txBody>
       </p:sp>
@@ -3994,7 +4134,7 @@
         <p:spPr>
           <a:xfrm>
             <a:off x="457200" y="2331720"/>
-            <a:ext cx="8229600" cy="2011680"/>
+            <a:ext cx="4069080" cy="2011680"/>
           </a:xfrm>
           <a:prstGeom prst="rect">
             <a:avLst/>
@@ -4008,13 +4148,13 @@
           <a:p>
             <a:pPr marL="342900" indent="-342900">
               <a:spcAft>
-                <a:spcPts val="600"/>
+                <a:spcPts val="800"/>
               </a:spcAft>
               <a:buSzPct val="100000"/>
               <a:buChar char="●"/>
             </a:pPr>
             <a:r>
-              <a:rPr lang="en-US" sz="1300" dirty="0">
+              <a:rPr lang="en-US" sz="1200" dirty="0">
                 <a:solidFill>
                   <a:srgbClr val="1E293B"/>
                 </a:solidFill>
@@ -4024,18 +4164,18 @@
               </a:rPr>
               <a:t>MCP = Standard protocol: any AI host ↔ any service ('USB for AI')</a:t>
             </a:r>
-            <a:endParaRPr lang="en-US" sz="1300" dirty="0"/>
+            <a:endParaRPr lang="en-US" sz="1200" dirty="0"/>
           </a:p>
           <a:p>
             <a:pPr marL="342900" indent="-342900">
               <a:spcAft>
-                <a:spcPts val="600"/>
+                <a:spcPts val="800"/>
               </a:spcAft>
               <a:buSzPct val="100000"/>
               <a:buChar char="●"/>
             </a:pPr>
             <a:r>
-              <a:rPr lang="en-US" sz="1300" dirty="0">
+              <a:rPr lang="en-US" sz="1200" dirty="0">
                 <a:solidFill>
                   <a:srgbClr val="1E293B"/>
                 </a:solidFill>
@@ -4045,18 +4185,18 @@
               </a:rPr>
               <a:t>Servers expose: Tools (actions), Resources (data), Prompts (templates)</a:t>
             </a:r>
-            <a:endParaRPr lang="en-US" sz="1300" dirty="0"/>
+            <a:endParaRPr lang="en-US" sz="1200" dirty="0"/>
           </a:p>
           <a:p>
             <a:pPr marL="342900" indent="-342900">
               <a:spcAft>
-                <a:spcPts val="600"/>
+                <a:spcPts val="800"/>
               </a:spcAft>
               <a:buSzPct val="100000"/>
               <a:buChar char="●"/>
             </a:pPr>
             <a:r>
-              <a:rPr lang="en-US" sz="1300" dirty="0">
+              <a:rPr lang="en-US" sz="1200" dirty="0">
                 <a:solidFill>
                   <a:srgbClr val="1E293B"/>
                 </a:solidFill>
@@ -4066,18 +4206,18 @@
               </a:rPr>
               <a:t>Skills = packaged domain knowledge + tool configurations</a:t>
             </a:r>
-            <a:endParaRPr lang="en-US" sz="1300" dirty="0"/>
+            <a:endParaRPr lang="en-US" sz="1200" dirty="0"/>
           </a:p>
           <a:p>
             <a:pPr marL="342900" indent="-342900">
               <a:spcAft>
-                <a:spcPts val="600"/>
+                <a:spcPts val="800"/>
               </a:spcAft>
               <a:buSzPct val="100000"/>
               <a:buChar char="●"/>
             </a:pPr>
             <a:r>
-              <a:rPr lang="en-US" sz="1300" dirty="0">
+              <a:rPr lang="en-US" sz="1200" dirty="0">
                 <a:solidFill>
                   <a:srgbClr val="1E293B"/>
                 </a:solidFill>
@@ -4087,7 +4227,7 @@
               </a:rPr>
               <a:t>N+M solution instead of N×M — write once, use everywhere</a:t>
             </a:r>
-            <a:endParaRPr lang="en-US" sz="1300" dirty="0"/>
+            <a:endParaRPr lang="en-US" sz="1200" dirty="0"/>
           </a:p>
         </p:txBody>
       </p:sp>
@@ -4099,16 +4239,23 @@
         </p:nvSpPr>
         <p:spPr>
           <a:xfrm>
-            <a:off x="457200" y="4434840"/>
-            <a:ext cx="8229600" cy="502920"/>
-          </a:xfrm>
-          <a:prstGeom prst="rect">
-            <a:avLst/>
-          </a:prstGeom>
-          <a:solidFill>
-            <a:srgbClr val="F0FDF4"/>
-          </a:solidFill>
-          <a:ln/>
+            <a:off x="4663440" y="1920240"/>
+            <a:ext cx="4160520" cy="2468880"/>
+          </a:xfrm>
+          <a:prstGeom prst="rect">
+            <a:avLst/>
+          </a:prstGeom>
+          <a:solidFill>
+            <a:srgbClr val="FFFFFF"/>
+          </a:solidFill>
+          <a:ln/>
+          <a:effectLst>
+            <a:outerShdw sx="100000" sy="100000" kx="0" ky="0" algn="bl" rotWithShape="0" blurRad="76200" dist="25400" dir="8100000">
+              <a:srgbClr val="000000">
+                <a:alpha val="12000"/>
+              </a:srgbClr>
+            </a:outerShdw>
+          </a:effectLst>
         </p:spPr>
       </p:sp>
       <p:sp>
@@ -4119,14 +4266,14 @@
         </p:nvSpPr>
         <p:spPr>
           <a:xfrm>
-            <a:off x="457200" y="4434840"/>
-            <a:ext cx="54864" cy="502920"/>
-          </a:xfrm>
-          <a:prstGeom prst="rect">
-            <a:avLst/>
-          </a:prstGeom>
-          <a:solidFill>
-            <a:srgbClr val="10B981"/>
+            <a:off x="4663440" y="1920240"/>
+            <a:ext cx="4160520" cy="45720"/>
+          </a:xfrm>
+          <a:prstGeom prst="rect">
+            <a:avLst/>
+          </a:prstGeom>
+          <a:solidFill>
+            <a:srgbClr val="06B6D4"/>
           </a:solidFill>
           <a:ln/>
         </p:spPr>
@@ -4141,6 +4288,69 @@
         </p:nvPicPr>
         <p:blipFill>
           <a:blip r:embed="rId3"/>
+          <a:srcRect l="0" r="0" t="0" b="0"/>
+          <a:stretch/>
+        </p:blipFill>
+        <p:spPr>
+          <a:xfrm>
+            <a:off x="4754880" y="2029968"/>
+            <a:ext cx="3977640" cy="2249424"/>
+          </a:xfrm>
+          <a:prstGeom prst="rect">
+            <a:avLst/>
+          </a:prstGeom>
+        </p:spPr>
+      </p:pic>
+      <p:sp>
+        <p:nvSpPr>
+          <p:cNvPr id="18" name="Shape 13"/>
+          <p:cNvSpPr/>
+          <p:nvPr/>
+        </p:nvSpPr>
+        <p:spPr>
+          <a:xfrm>
+            <a:off x="457200" y="4434840"/>
+            <a:ext cx="8229600" cy="502920"/>
+          </a:xfrm>
+          <a:prstGeom prst="rect">
+            <a:avLst/>
+          </a:prstGeom>
+          <a:solidFill>
+            <a:srgbClr val="F0FDF4"/>
+          </a:solidFill>
+          <a:ln/>
+        </p:spPr>
+      </p:sp>
+      <p:sp>
+        <p:nvSpPr>
+          <p:cNvPr id="19" name="Shape 14"/>
+          <p:cNvSpPr/>
+          <p:nvPr/>
+        </p:nvSpPr>
+        <p:spPr>
+          <a:xfrm>
+            <a:off x="457200" y="4434840"/>
+            <a:ext cx="54864" cy="502920"/>
+          </a:xfrm>
+          <a:prstGeom prst="rect">
+            <a:avLst/>
+          </a:prstGeom>
+          <a:solidFill>
+            <a:srgbClr val="10B981"/>
+          </a:solidFill>
+          <a:ln/>
+        </p:spPr>
+      </p:sp>
+      <p:pic>
+        <p:nvPicPr>
+          <p:cNvPr id="20" name="Image 3" descr="preencoded.png">    </p:cNvPr>
+          <p:cNvPicPr>
+            <a:picLocks noChangeAspect="1"/>
+          </p:cNvPicPr>
+          <p:nvPr/>
+        </p:nvPicPr>
+        <p:blipFill>
+          <a:blip r:embed="rId4"/>
           <a:stretch>
             <a:fillRect/>
           </a:stretch>
@@ -4157,7 +4367,7 @@
       </p:pic>
       <p:sp>
         <p:nvSpPr>
-          <p:cNvPr id="18" name="Text 13"/>
+          <p:cNvPr id="21" name="Text 15"/>
           <p:cNvSpPr/>
           <p:nvPr/>
         </p:nvSpPr>
@@ -4542,7 +4752,7 @@
         <p:spPr>
           <a:xfrm>
             <a:off x="457200" y="1965960"/>
-            <a:ext cx="2743200" cy="365760"/>
+            <a:ext cx="4023360" cy="347472"/>
           </a:xfrm>
           <a:prstGeom prst="rect">
             <a:avLst/>
@@ -4558,7 +4768,7 @@
               <a:buNone/>
             </a:pPr>
             <a:r>
-              <a:rPr lang="en-US" sz="1600" b="1" dirty="0">
+              <a:rPr lang="en-US" sz="1500" b="1" dirty="0">
                 <a:solidFill>
                   <a:srgbClr val="0F172A"/>
                 </a:solidFill>
@@ -4568,7 +4778,7 @@
               </a:rPr>
               <a:t>Key Concepts</a:t>
             </a:r>
-            <a:endParaRPr lang="en-US" sz="1600" dirty="0"/>
+            <a:endParaRPr lang="en-US" sz="1500" dirty="0"/>
           </a:p>
         </p:txBody>
       </p:sp>
@@ -4581,7 +4791,7 @@
         <p:spPr>
           <a:xfrm>
             <a:off x="457200" y="2331720"/>
-            <a:ext cx="8229600" cy="2011680"/>
+            <a:ext cx="4069080" cy="2011680"/>
           </a:xfrm>
           <a:prstGeom prst="rect">
             <a:avLst/>
@@ -4595,13 +4805,13 @@
           <a:p>
             <a:pPr marL="342900" indent="-342900">
               <a:spcAft>
-                <a:spcPts val="600"/>
+                <a:spcPts val="800"/>
               </a:spcAft>
               <a:buSzPct val="100000"/>
               <a:buChar char="●"/>
             </a:pPr>
             <a:r>
-              <a:rPr lang="en-US" sz="1300" dirty="0">
+              <a:rPr lang="en-US" sz="1200" dirty="0">
                 <a:solidFill>
                   <a:srgbClr val="1E293B"/>
                 </a:solidFill>
@@ -4611,18 +4821,18 @@
               </a:rPr>
               <a:t>GitHub Copilot, Claude Code, Cursor, Devin — all use these patterns</a:t>
             </a:r>
-            <a:endParaRPr lang="en-US" sz="1300" dirty="0"/>
+            <a:endParaRPr lang="en-US" sz="1200" dirty="0"/>
           </a:p>
           <a:p>
             <a:pPr marL="342900" indent="-342900">
               <a:spcAft>
-                <a:spcPts val="600"/>
+                <a:spcPts val="800"/>
               </a:spcAft>
               <a:buSzPct val="100000"/>
               <a:buChar char="●"/>
             </a:pPr>
             <a:r>
-              <a:rPr lang="en-US" sz="1300" dirty="0">
+              <a:rPr lang="en-US" sz="1200" dirty="0">
                 <a:solidFill>
                   <a:srgbClr val="1E293B"/>
                 </a:solidFill>
@@ -4632,18 +4842,18 @@
               </a:rPr>
               <a:t>LLM core + ReAct loop + tools via MCP + context engineering</a:t>
             </a:r>
-            <a:endParaRPr lang="en-US" sz="1300" dirty="0"/>
+            <a:endParaRPr lang="en-US" sz="1200" dirty="0"/>
           </a:p>
           <a:p>
             <a:pPr marL="342900" indent="-342900">
               <a:spcAft>
-                <a:spcPts val="600"/>
+                <a:spcPts val="800"/>
               </a:spcAft>
               <a:buSzPct val="100000"/>
               <a:buChar char="●"/>
             </a:pPr>
             <a:r>
-              <a:rPr lang="en-US" sz="1300" dirty="0">
+              <a:rPr lang="en-US" sz="1200" dirty="0">
                 <a:solidFill>
                   <a:srgbClr val="1E293B"/>
                 </a:solidFill>
@@ -4653,18 +4863,18 @@
               </a:rPr>
               <a:t>Planning agent with memory, reflection, and multi-agent collaboration</a:t>
             </a:r>
-            <a:endParaRPr lang="en-US" sz="1300" dirty="0"/>
+            <a:endParaRPr lang="en-US" sz="1200" dirty="0"/>
           </a:p>
           <a:p>
             <a:pPr marL="342900" indent="-342900">
               <a:spcAft>
-                <a:spcPts val="600"/>
+                <a:spcPts val="800"/>
               </a:spcAft>
               <a:buSzPct val="100000"/>
               <a:buChar char="●"/>
             </a:pPr>
             <a:r>
-              <a:rPr lang="en-US" sz="1300" dirty="0">
+              <a:rPr lang="en-US" sz="1200" dirty="0">
                 <a:solidFill>
                   <a:srgbClr val="1E293B"/>
                 </a:solidFill>
@@ -4674,7 +4884,7 @@
               </a:rPr>
               <a:t>Capstone: mini coding assistant combining Modules 01–09</a:t>
             </a:r>
-            <a:endParaRPr lang="en-US" sz="1300" dirty="0"/>
+            <a:endParaRPr lang="en-US" sz="1200" dirty="0"/>
           </a:p>
         </p:txBody>
       </p:sp>
@@ -4686,16 +4896,23 @@
         </p:nvSpPr>
         <p:spPr>
           <a:xfrm>
-            <a:off x="457200" y="4434840"/>
-            <a:ext cx="8229600" cy="502920"/>
-          </a:xfrm>
-          <a:prstGeom prst="rect">
-            <a:avLst/>
-          </a:prstGeom>
-          <a:solidFill>
-            <a:srgbClr val="F0FDF4"/>
-          </a:solidFill>
-          <a:ln/>
+            <a:off x="4663440" y="1920240"/>
+            <a:ext cx="4160520" cy="2468880"/>
+          </a:xfrm>
+          <a:prstGeom prst="rect">
+            <a:avLst/>
+          </a:prstGeom>
+          <a:solidFill>
+            <a:srgbClr val="FFFFFF"/>
+          </a:solidFill>
+          <a:ln/>
+          <a:effectLst>
+            <a:outerShdw sx="100000" sy="100000" kx="0" ky="0" algn="bl" rotWithShape="0" blurRad="76200" dist="25400" dir="8100000">
+              <a:srgbClr val="000000">
+                <a:alpha val="12000"/>
+              </a:srgbClr>
+            </a:outerShdw>
+          </a:effectLst>
         </p:spPr>
       </p:sp>
       <p:sp>
@@ -4706,14 +4923,14 @@
         </p:nvSpPr>
         <p:spPr>
           <a:xfrm>
-            <a:off x="457200" y="4434840"/>
-            <a:ext cx="54864" cy="502920"/>
-          </a:xfrm>
-          <a:prstGeom prst="rect">
-            <a:avLst/>
-          </a:prstGeom>
-          <a:solidFill>
-            <a:srgbClr val="10B981"/>
+            <a:off x="4663440" y="1920240"/>
+            <a:ext cx="4160520" cy="45720"/>
+          </a:xfrm>
+          <a:prstGeom prst="rect">
+            <a:avLst/>
+          </a:prstGeom>
+          <a:solidFill>
+            <a:srgbClr val="06B6D4"/>
           </a:solidFill>
           <a:ln/>
         </p:spPr>
@@ -4728,6 +4945,69 @@
         </p:nvPicPr>
         <p:blipFill>
           <a:blip r:embed="rId3"/>
+          <a:srcRect l="0" r="0" t="0" b="0"/>
+          <a:stretch/>
+        </p:blipFill>
+        <p:spPr>
+          <a:xfrm>
+            <a:off x="4754880" y="2029968"/>
+            <a:ext cx="3977640" cy="2249424"/>
+          </a:xfrm>
+          <a:prstGeom prst="rect">
+            <a:avLst/>
+          </a:prstGeom>
+        </p:spPr>
+      </p:pic>
+      <p:sp>
+        <p:nvSpPr>
+          <p:cNvPr id="18" name="Shape 13"/>
+          <p:cNvSpPr/>
+          <p:nvPr/>
+        </p:nvSpPr>
+        <p:spPr>
+          <a:xfrm>
+            <a:off x="457200" y="4434840"/>
+            <a:ext cx="8229600" cy="502920"/>
+          </a:xfrm>
+          <a:prstGeom prst="rect">
+            <a:avLst/>
+          </a:prstGeom>
+          <a:solidFill>
+            <a:srgbClr val="F0FDF4"/>
+          </a:solidFill>
+          <a:ln/>
+        </p:spPr>
+      </p:sp>
+      <p:sp>
+        <p:nvSpPr>
+          <p:cNvPr id="19" name="Shape 14"/>
+          <p:cNvSpPr/>
+          <p:nvPr/>
+        </p:nvSpPr>
+        <p:spPr>
+          <a:xfrm>
+            <a:off x="457200" y="4434840"/>
+            <a:ext cx="54864" cy="502920"/>
+          </a:xfrm>
+          <a:prstGeom prst="rect">
+            <a:avLst/>
+          </a:prstGeom>
+          <a:solidFill>
+            <a:srgbClr val="10B981"/>
+          </a:solidFill>
+          <a:ln/>
+        </p:spPr>
+      </p:sp>
+      <p:pic>
+        <p:nvPicPr>
+          <p:cNvPr id="20" name="Image 3" descr="preencoded.png">    </p:cNvPr>
+          <p:cNvPicPr>
+            <a:picLocks noChangeAspect="1"/>
+          </p:cNvPicPr>
+          <p:nvPr/>
+        </p:nvPicPr>
+        <p:blipFill>
+          <a:blip r:embed="rId4"/>
           <a:stretch>
             <a:fillRect/>
           </a:stretch>
@@ -4744,7 +5024,7 @@
       </p:pic>
       <p:sp>
         <p:nvSpPr>
-          <p:cNvPr id="18" name="Text 13"/>
+          <p:cNvPr id="21" name="Text 15"/>
           <p:cNvSpPr/>
           <p:nvPr/>
         </p:nvSpPr>
@@ -9897,7 +10177,7 @@
         <p:spPr>
           <a:xfrm>
             <a:off x="457200" y="1965960"/>
-            <a:ext cx="2743200" cy="365760"/>
+            <a:ext cx="4023360" cy="347472"/>
           </a:xfrm>
           <a:prstGeom prst="rect">
             <a:avLst/>
@@ -9913,7 +10193,7 @@
               <a:buNone/>
             </a:pPr>
             <a:r>
-              <a:rPr lang="en-US" sz="1600" b="1" dirty="0">
+              <a:rPr lang="en-US" sz="1500" b="1" dirty="0">
                 <a:solidFill>
                   <a:srgbClr val="0F172A"/>
                 </a:solidFill>
@@ -9923,7 +10203,7 @@
               </a:rPr>
               <a:t>Key Concepts</a:t>
             </a:r>
-            <a:endParaRPr lang="en-US" sz="1600" dirty="0"/>
+            <a:endParaRPr lang="en-US" sz="1500" dirty="0"/>
           </a:p>
         </p:txBody>
       </p:sp>
@@ -9936,7 +10216,7 @@
         <p:spPr>
           <a:xfrm>
             <a:off x="457200" y="2331720"/>
-            <a:ext cx="8229600" cy="2011680"/>
+            <a:ext cx="4069080" cy="2011680"/>
           </a:xfrm>
           <a:prstGeom prst="rect">
             <a:avLst/>
@@ -9950,13 +10230,13 @@
           <a:p>
             <a:pPr marL="342900" indent="-342900">
               <a:spcAft>
-                <a:spcPts val="600"/>
+                <a:spcPts val="800"/>
               </a:spcAft>
               <a:buSzPct val="100000"/>
               <a:buChar char="●"/>
             </a:pPr>
             <a:r>
-              <a:rPr lang="en-US" sz="1300" dirty="0">
+              <a:rPr lang="en-US" sz="1200" dirty="0">
                 <a:solidFill>
                   <a:srgbClr val="1E293B"/>
                 </a:solidFill>
@@ -9966,18 +10246,18 @@
               </a:rPr>
               <a:t>Transformer architecture: Attention Is All You Need (Vaswani, 2017)</a:t>
             </a:r>
-            <a:endParaRPr lang="en-US" sz="1300" dirty="0"/>
+            <a:endParaRPr lang="en-US" sz="1200" dirty="0"/>
           </a:p>
           <a:p>
             <a:pPr marL="342900" indent="-342900">
               <a:spcAft>
-                <a:spcPts val="600"/>
+                <a:spcPts val="800"/>
               </a:spcAft>
               <a:buSzPct val="100000"/>
               <a:buChar char="●"/>
             </a:pPr>
             <a:r>
-              <a:rPr lang="en-US" sz="1300" dirty="0">
+              <a:rPr lang="en-US" sz="1200" dirty="0">
                 <a:solidFill>
                   <a:srgbClr val="1E293B"/>
                 </a:solidFill>
@@ -9987,18 +10267,18 @@
               </a:rPr>
               <a:t>Emergent abilities at scale: few-shot learning, chain-of-thought, code gen</a:t>
             </a:r>
-            <a:endParaRPr lang="en-US" sz="1300" dirty="0"/>
+            <a:endParaRPr lang="en-US" sz="1200" dirty="0"/>
           </a:p>
           <a:p>
             <a:pPr marL="342900" indent="-342900">
               <a:spcAft>
-                <a:spcPts val="600"/>
+                <a:spcPts val="800"/>
               </a:spcAft>
               <a:buSzPct val="100000"/>
               <a:buChar char="●"/>
             </a:pPr>
             <a:r>
-              <a:rPr lang="en-US" sz="1300" dirty="0">
+              <a:rPr lang="en-US" sz="1200" dirty="0">
                 <a:solidFill>
                   <a:srgbClr val="1E293B"/>
                 </a:solidFill>
@@ -10008,18 +10288,18 @@
               </a:rPr>
               <a:t>Core limits: no memory, knowledge cutoff, hallucination, no actions</a:t>
             </a:r>
-            <a:endParaRPr lang="en-US" sz="1300" dirty="0"/>
+            <a:endParaRPr lang="en-US" sz="1200" dirty="0"/>
           </a:p>
           <a:p>
             <a:pPr marL="342900" indent="-342900">
               <a:spcAft>
-                <a:spcPts val="600"/>
+                <a:spcPts val="800"/>
               </a:spcAft>
               <a:buSzPct val="100000"/>
               <a:buChar char="●"/>
             </a:pPr>
             <a:r>
-              <a:rPr lang="en-US" sz="1300" dirty="0">
+              <a:rPr lang="en-US" sz="1200" dirty="0">
                 <a:solidFill>
                   <a:srgbClr val="1E293B"/>
                 </a:solidFill>
@@ -10029,7 +10309,7 @@
               </a:rPr>
               <a:t>Every API call is independent — the model forgets everything</a:t>
             </a:r>
-            <a:endParaRPr lang="en-US" sz="1300" dirty="0"/>
+            <a:endParaRPr lang="en-US" sz="1200" dirty="0"/>
           </a:p>
         </p:txBody>
       </p:sp>
@@ -10041,16 +10321,23 @@
         </p:nvSpPr>
         <p:spPr>
           <a:xfrm>
-            <a:off x="457200" y="4434840"/>
-            <a:ext cx="8229600" cy="502920"/>
-          </a:xfrm>
-          <a:prstGeom prst="rect">
-            <a:avLst/>
-          </a:prstGeom>
-          <a:solidFill>
-            <a:srgbClr val="F0FDF4"/>
-          </a:solidFill>
-          <a:ln/>
+            <a:off x="4663440" y="1920240"/>
+            <a:ext cx="4160520" cy="2468880"/>
+          </a:xfrm>
+          <a:prstGeom prst="rect">
+            <a:avLst/>
+          </a:prstGeom>
+          <a:solidFill>
+            <a:srgbClr val="FFFFFF"/>
+          </a:solidFill>
+          <a:ln/>
+          <a:effectLst>
+            <a:outerShdw sx="100000" sy="100000" kx="0" ky="0" algn="bl" rotWithShape="0" blurRad="76200" dist="25400" dir="8100000">
+              <a:srgbClr val="000000">
+                <a:alpha val="12000"/>
+              </a:srgbClr>
+            </a:outerShdw>
+          </a:effectLst>
         </p:spPr>
       </p:sp>
       <p:sp>
@@ -10061,14 +10348,14 @@
         </p:nvSpPr>
         <p:spPr>
           <a:xfrm>
-            <a:off x="457200" y="4434840"/>
-            <a:ext cx="54864" cy="502920"/>
-          </a:xfrm>
-          <a:prstGeom prst="rect">
-            <a:avLst/>
-          </a:prstGeom>
-          <a:solidFill>
-            <a:srgbClr val="10B981"/>
+            <a:off x="4663440" y="1920240"/>
+            <a:ext cx="4160520" cy="45720"/>
+          </a:xfrm>
+          <a:prstGeom prst="rect">
+            <a:avLst/>
+          </a:prstGeom>
+          <a:solidFill>
+            <a:srgbClr val="06B6D4"/>
           </a:solidFill>
           <a:ln/>
         </p:spPr>
@@ -10083,6 +10370,69 @@
         </p:nvPicPr>
         <p:blipFill>
           <a:blip r:embed="rId3"/>
+          <a:srcRect l="0" r="0" t="0" b="0"/>
+          <a:stretch/>
+        </p:blipFill>
+        <p:spPr>
+          <a:xfrm>
+            <a:off x="4754880" y="2029968"/>
+            <a:ext cx="3977640" cy="2249424"/>
+          </a:xfrm>
+          <a:prstGeom prst="rect">
+            <a:avLst/>
+          </a:prstGeom>
+        </p:spPr>
+      </p:pic>
+      <p:sp>
+        <p:nvSpPr>
+          <p:cNvPr id="18" name="Shape 13"/>
+          <p:cNvSpPr/>
+          <p:nvPr/>
+        </p:nvSpPr>
+        <p:spPr>
+          <a:xfrm>
+            <a:off x="457200" y="4434840"/>
+            <a:ext cx="8229600" cy="502920"/>
+          </a:xfrm>
+          <a:prstGeom prst="rect">
+            <a:avLst/>
+          </a:prstGeom>
+          <a:solidFill>
+            <a:srgbClr val="F0FDF4"/>
+          </a:solidFill>
+          <a:ln/>
+        </p:spPr>
+      </p:sp>
+      <p:sp>
+        <p:nvSpPr>
+          <p:cNvPr id="19" name="Shape 14"/>
+          <p:cNvSpPr/>
+          <p:nvPr/>
+        </p:nvSpPr>
+        <p:spPr>
+          <a:xfrm>
+            <a:off x="457200" y="4434840"/>
+            <a:ext cx="54864" cy="502920"/>
+          </a:xfrm>
+          <a:prstGeom prst="rect">
+            <a:avLst/>
+          </a:prstGeom>
+          <a:solidFill>
+            <a:srgbClr val="10B981"/>
+          </a:solidFill>
+          <a:ln/>
+        </p:spPr>
+      </p:sp>
+      <p:pic>
+        <p:nvPicPr>
+          <p:cNvPr id="20" name="Image 3" descr="preencoded.png">    </p:cNvPr>
+          <p:cNvPicPr>
+            <a:picLocks noChangeAspect="1"/>
+          </p:cNvPicPr>
+          <p:nvPr/>
+        </p:nvPicPr>
+        <p:blipFill>
+          <a:blip r:embed="rId4"/>
           <a:stretch>
             <a:fillRect/>
           </a:stretch>
@@ -10099,7 +10449,7 @@
       </p:pic>
       <p:sp>
         <p:nvSpPr>
-          <p:cNvPr id="18" name="Text 13"/>
+          <p:cNvPr id="21" name="Text 15"/>
           <p:cNvSpPr/>
           <p:nvPr/>
         </p:nvSpPr>
@@ -11071,7 +11421,7 @@
         <p:spPr>
           <a:xfrm>
             <a:off x="457200" y="1965960"/>
-            <a:ext cx="2743200" cy="365760"/>
+            <a:ext cx="4023360" cy="347472"/>
           </a:xfrm>
           <a:prstGeom prst="rect">
             <a:avLst/>
@@ -11087,7 +11437,7 @@
               <a:buNone/>
             </a:pPr>
             <a:r>
-              <a:rPr lang="en-US" sz="1600" b="1" dirty="0">
+              <a:rPr lang="en-US" sz="1500" b="1" dirty="0">
                 <a:solidFill>
                   <a:srgbClr val="0F172A"/>
                 </a:solidFill>
@@ -11097,7 +11447,7 @@
               </a:rPr>
               <a:t>Key Concepts</a:t>
             </a:r>
-            <a:endParaRPr lang="en-US" sz="1600" dirty="0"/>
+            <a:endParaRPr lang="en-US" sz="1500" dirty="0"/>
           </a:p>
         </p:txBody>
       </p:sp>
@@ -11110,7 +11460,7 @@
         <p:spPr>
           <a:xfrm>
             <a:off x="457200" y="2331720"/>
-            <a:ext cx="8229600" cy="2011680"/>
+            <a:ext cx="4069080" cy="2011680"/>
           </a:xfrm>
           <a:prstGeom prst="rect">
             <a:avLst/>
@@ -11124,13 +11474,13 @@
           <a:p>
             <a:pPr marL="342900" indent="-342900">
               <a:spcAft>
-                <a:spcPts val="600"/>
+                <a:spcPts val="800"/>
               </a:spcAft>
               <a:buSzPct val="100000"/>
               <a:buChar char="●"/>
             </a:pPr>
             <a:r>
-              <a:rPr lang="en-US" sz="1300" dirty="0">
+              <a:rPr lang="en-US" sz="1200" dirty="0">
                 <a:solidFill>
                   <a:srgbClr val="1E293B"/>
                 </a:solidFill>
@@ -11140,18 +11490,18 @@
               </a:rPr>
               <a:t>Embed → Store → Retrieve → Augment → Generate</a:t>
             </a:r>
-            <a:endParaRPr lang="en-US" sz="1300" dirty="0"/>
+            <a:endParaRPr lang="en-US" sz="1200" dirty="0"/>
           </a:p>
           <a:p>
             <a:pPr marL="342900" indent="-342900">
               <a:spcAft>
-                <a:spcPts val="600"/>
+                <a:spcPts val="800"/>
               </a:spcAft>
               <a:buSzPct val="100000"/>
               <a:buChar char="●"/>
             </a:pPr>
             <a:r>
-              <a:rPr lang="en-US" sz="1300" dirty="0">
+              <a:rPr lang="en-US" sz="1200" dirty="0">
                 <a:solidFill>
                   <a:srgbClr val="1E293B"/>
                 </a:solidFill>
@@ -11161,18 +11511,18 @@
               </a:rPr>
               <a:t>Vector embeddings: semantic similarity via cosine distance</a:t>
             </a:r>
-            <a:endParaRPr lang="en-US" sz="1300" dirty="0"/>
+            <a:endParaRPr lang="en-US" sz="1200" dirty="0"/>
           </a:p>
           <a:p>
             <a:pPr marL="342900" indent="-342900">
               <a:spcAft>
-                <a:spcPts val="600"/>
+                <a:spcPts val="800"/>
               </a:spcAft>
               <a:buSzPct val="100000"/>
               <a:buChar char="●"/>
             </a:pPr>
             <a:r>
-              <a:rPr lang="en-US" sz="1300" dirty="0">
+              <a:rPr lang="en-US" sz="1200" dirty="0">
                 <a:solidFill>
                   <a:srgbClr val="1E293B"/>
                 </a:solidFill>
@@ -11182,18 +11532,18 @@
               </a:rPr>
               <a:t>Grounding eliminates hallucination for known knowledge</a:t>
             </a:r>
-            <a:endParaRPr lang="en-US" sz="1300" dirty="0"/>
+            <a:endParaRPr lang="en-US" sz="1200" dirty="0"/>
           </a:p>
           <a:p>
             <a:pPr marL="342900" indent="-342900">
               <a:spcAft>
-                <a:spcPts val="600"/>
+                <a:spcPts val="800"/>
               </a:spcAft>
               <a:buSzPct val="100000"/>
               <a:buChar char="●"/>
             </a:pPr>
             <a:r>
-              <a:rPr lang="en-US" sz="1300" dirty="0">
+              <a:rPr lang="en-US" sz="1200" dirty="0">
                 <a:solidFill>
                   <a:srgbClr val="1E293B"/>
                 </a:solidFill>
@@ -11203,7 +11553,7 @@
               </a:rPr>
               <a:t>Read-only pattern — can't take actions or iterate</a:t>
             </a:r>
-            <a:endParaRPr lang="en-US" sz="1300" dirty="0"/>
+            <a:endParaRPr lang="en-US" sz="1200" dirty="0"/>
           </a:p>
         </p:txBody>
       </p:sp>
@@ -11215,16 +11565,23 @@
         </p:nvSpPr>
         <p:spPr>
           <a:xfrm>
-            <a:off x="457200" y="4434840"/>
-            <a:ext cx="8229600" cy="502920"/>
-          </a:xfrm>
-          <a:prstGeom prst="rect">
-            <a:avLst/>
-          </a:prstGeom>
-          <a:solidFill>
-            <a:srgbClr val="F0FDF4"/>
-          </a:solidFill>
-          <a:ln/>
+            <a:off x="4663440" y="1920240"/>
+            <a:ext cx="4160520" cy="2468880"/>
+          </a:xfrm>
+          <a:prstGeom prst="rect">
+            <a:avLst/>
+          </a:prstGeom>
+          <a:solidFill>
+            <a:srgbClr val="FFFFFF"/>
+          </a:solidFill>
+          <a:ln/>
+          <a:effectLst>
+            <a:outerShdw sx="100000" sy="100000" kx="0" ky="0" algn="bl" rotWithShape="0" blurRad="76200" dist="25400" dir="8100000">
+              <a:srgbClr val="000000">
+                <a:alpha val="12000"/>
+              </a:srgbClr>
+            </a:outerShdw>
+          </a:effectLst>
         </p:spPr>
       </p:sp>
       <p:sp>
@@ -11235,14 +11592,14 @@
         </p:nvSpPr>
         <p:spPr>
           <a:xfrm>
-            <a:off x="457200" y="4434840"/>
-            <a:ext cx="54864" cy="502920"/>
-          </a:xfrm>
-          <a:prstGeom prst="rect">
-            <a:avLst/>
-          </a:prstGeom>
-          <a:solidFill>
-            <a:srgbClr val="10B981"/>
+            <a:off x="4663440" y="1920240"/>
+            <a:ext cx="4160520" cy="45720"/>
+          </a:xfrm>
+          <a:prstGeom prst="rect">
+            <a:avLst/>
+          </a:prstGeom>
+          <a:solidFill>
+            <a:srgbClr val="06B6D4"/>
           </a:solidFill>
           <a:ln/>
         </p:spPr>
@@ -11257,6 +11614,69 @@
         </p:nvPicPr>
         <p:blipFill>
           <a:blip r:embed="rId3"/>
+          <a:srcRect l="0" r="0" t="0" b="0"/>
+          <a:stretch/>
+        </p:blipFill>
+        <p:spPr>
+          <a:xfrm>
+            <a:off x="4754880" y="2029968"/>
+            <a:ext cx="3977640" cy="2249424"/>
+          </a:xfrm>
+          <a:prstGeom prst="rect">
+            <a:avLst/>
+          </a:prstGeom>
+        </p:spPr>
+      </p:pic>
+      <p:sp>
+        <p:nvSpPr>
+          <p:cNvPr id="18" name="Shape 13"/>
+          <p:cNvSpPr/>
+          <p:nvPr/>
+        </p:nvSpPr>
+        <p:spPr>
+          <a:xfrm>
+            <a:off x="457200" y="4434840"/>
+            <a:ext cx="8229600" cy="502920"/>
+          </a:xfrm>
+          <a:prstGeom prst="rect">
+            <a:avLst/>
+          </a:prstGeom>
+          <a:solidFill>
+            <a:srgbClr val="F0FDF4"/>
+          </a:solidFill>
+          <a:ln/>
+        </p:spPr>
+      </p:sp>
+      <p:sp>
+        <p:nvSpPr>
+          <p:cNvPr id="19" name="Shape 14"/>
+          <p:cNvSpPr/>
+          <p:nvPr/>
+        </p:nvSpPr>
+        <p:spPr>
+          <a:xfrm>
+            <a:off x="457200" y="4434840"/>
+            <a:ext cx="54864" cy="502920"/>
+          </a:xfrm>
+          <a:prstGeom prst="rect">
+            <a:avLst/>
+          </a:prstGeom>
+          <a:solidFill>
+            <a:srgbClr val="10B981"/>
+          </a:solidFill>
+          <a:ln/>
+        </p:spPr>
+      </p:sp>
+      <p:pic>
+        <p:nvPicPr>
+          <p:cNvPr id="20" name="Image 3" descr="preencoded.png">    </p:cNvPr>
+          <p:cNvPicPr>
+            <a:picLocks noChangeAspect="1"/>
+          </p:cNvPicPr>
+          <p:nvPr/>
+        </p:nvPicPr>
+        <p:blipFill>
+          <a:blip r:embed="rId4"/>
           <a:stretch>
             <a:fillRect/>
           </a:stretch>
@@ -11273,7 +11693,7 @@
       </p:pic>
       <p:sp>
         <p:nvSpPr>
-          <p:cNvPr id="18" name="Text 13"/>
+          <p:cNvPr id="21" name="Text 15"/>
           <p:cNvSpPr/>
           <p:nvPr/>
         </p:nvSpPr>
@@ -11658,7 +12078,7 @@
         <p:spPr>
           <a:xfrm>
             <a:off x="457200" y="1965960"/>
-            <a:ext cx="2743200" cy="365760"/>
+            <a:ext cx="4023360" cy="347472"/>
           </a:xfrm>
           <a:prstGeom prst="rect">
             <a:avLst/>
@@ -11674,7 +12094,7 @@
               <a:buNone/>
             </a:pPr>
             <a:r>
-              <a:rPr lang="en-US" sz="1600" b="1" dirty="0">
+              <a:rPr lang="en-US" sz="1500" b="1" dirty="0">
                 <a:solidFill>
                   <a:srgbClr val="0F172A"/>
                 </a:solidFill>
@@ -11684,7 +12104,7 @@
               </a:rPr>
               <a:t>Key Concepts</a:t>
             </a:r>
-            <a:endParaRPr lang="en-US" sz="1600" dirty="0"/>
+            <a:endParaRPr lang="en-US" sz="1500" dirty="0"/>
           </a:p>
         </p:txBody>
       </p:sp>
@@ -11697,7 +12117,7 @@
         <p:spPr>
           <a:xfrm>
             <a:off x="457200" y="2331720"/>
-            <a:ext cx="8229600" cy="2011680"/>
+            <a:ext cx="4069080" cy="2011680"/>
           </a:xfrm>
           <a:prstGeom prst="rect">
             <a:avLst/>
@@ -11711,13 +12131,13 @@
           <a:p>
             <a:pPr marL="342900" indent="-342900">
               <a:spcAft>
-                <a:spcPts val="600"/>
+                <a:spcPts val="800"/>
               </a:spcAft>
               <a:buSzPct val="100000"/>
               <a:buChar char="●"/>
             </a:pPr>
             <a:r>
-              <a:rPr lang="en-US" sz="1300" dirty="0">
+              <a:rPr lang="en-US" sz="1200" dirty="0">
                 <a:solidFill>
                   <a:srgbClr val="1E293B"/>
                 </a:solidFill>
@@ -11727,18 +12147,18 @@
               </a:rPr>
               <a:t>LLM decides WHAT to call; your code EXECUTES it (safety boundary)</a:t>
             </a:r>
-            <a:endParaRPr lang="en-US" sz="1300" dirty="0"/>
+            <a:endParaRPr lang="en-US" sz="1200" dirty="0"/>
           </a:p>
           <a:p>
             <a:pPr marL="342900" indent="-342900">
               <a:spcAft>
-                <a:spcPts val="600"/>
+                <a:spcPts val="800"/>
               </a:spcAft>
               <a:buSzPct val="100000"/>
               <a:buChar char="●"/>
             </a:pPr>
             <a:r>
-              <a:rPr lang="en-US" sz="1300" dirty="0">
+              <a:rPr lang="en-US" sz="1200" dirty="0">
                 <a:solidFill>
                   <a:srgbClr val="1E293B"/>
                 </a:solidFill>
@@ -11748,18 +12168,18 @@
               </a:rPr>
               <a:t>Tools defined via JSON Schema — LLM reads the schema</a:t>
             </a:r>
-            <a:endParaRPr lang="en-US" sz="1300" dirty="0"/>
+            <a:endParaRPr lang="en-US" sz="1200" dirty="0"/>
           </a:p>
           <a:p>
             <a:pPr marL="342900" indent="-342900">
               <a:spcAft>
-                <a:spcPts val="600"/>
+                <a:spcPts val="800"/>
               </a:spcAft>
               <a:buSzPct val="100000"/>
               <a:buChar char="●"/>
             </a:pPr>
             <a:r>
-              <a:rPr lang="en-US" sz="1300" dirty="0">
+              <a:rPr lang="en-US" sz="1200" dirty="0">
                 <a:solidFill>
                   <a:srgbClr val="1E293B"/>
                 </a:solidFill>
@@ -11769,18 +12189,18 @@
               </a:rPr>
               <a:t>OpenAI introduced function calling (June 2023)</a:t>
             </a:r>
-            <a:endParaRPr lang="en-US" sz="1300" dirty="0"/>
+            <a:endParaRPr lang="en-US" sz="1200" dirty="0"/>
           </a:p>
           <a:p>
             <a:pPr marL="342900" indent="-342900">
               <a:spcAft>
-                <a:spcPts val="600"/>
+                <a:spcPts val="800"/>
               </a:spcAft>
               <a:buSzPct val="100000"/>
               <a:buChar char="●"/>
             </a:pPr>
             <a:r>
-              <a:rPr lang="en-US" sz="1300" dirty="0">
+              <a:rPr lang="en-US" sz="1200" dirty="0">
                 <a:solidFill>
                   <a:srgbClr val="1E293B"/>
                 </a:solidFill>
@@ -11790,7 +12210,7 @@
               </a:rPr>
               <a:t>Single-turn only — no multi-step reasoning yet</a:t>
             </a:r>
-            <a:endParaRPr lang="en-US" sz="1300" dirty="0"/>
+            <a:endParaRPr lang="en-US" sz="1200" dirty="0"/>
           </a:p>
         </p:txBody>
       </p:sp>
@@ -11802,16 +12222,23 @@
         </p:nvSpPr>
         <p:spPr>
           <a:xfrm>
-            <a:off x="457200" y="4434840"/>
-            <a:ext cx="8229600" cy="502920"/>
-          </a:xfrm>
-          <a:prstGeom prst="rect">
-            <a:avLst/>
-          </a:prstGeom>
-          <a:solidFill>
-            <a:srgbClr val="F0FDF4"/>
-          </a:solidFill>
-          <a:ln/>
+            <a:off x="4663440" y="1920240"/>
+            <a:ext cx="4160520" cy="2468880"/>
+          </a:xfrm>
+          <a:prstGeom prst="rect">
+            <a:avLst/>
+          </a:prstGeom>
+          <a:solidFill>
+            <a:srgbClr val="FFFFFF"/>
+          </a:solidFill>
+          <a:ln/>
+          <a:effectLst>
+            <a:outerShdw sx="100000" sy="100000" kx="0" ky="0" algn="bl" rotWithShape="0" blurRad="76200" dist="25400" dir="8100000">
+              <a:srgbClr val="000000">
+                <a:alpha val="12000"/>
+              </a:srgbClr>
+            </a:outerShdw>
+          </a:effectLst>
         </p:spPr>
       </p:sp>
       <p:sp>
@@ -11822,14 +12249,14 @@
         </p:nvSpPr>
         <p:spPr>
           <a:xfrm>
-            <a:off x="457200" y="4434840"/>
-            <a:ext cx="54864" cy="502920"/>
-          </a:xfrm>
-          <a:prstGeom prst="rect">
-            <a:avLst/>
-          </a:prstGeom>
-          <a:solidFill>
-            <a:srgbClr val="10B981"/>
+            <a:off x="4663440" y="1920240"/>
+            <a:ext cx="4160520" cy="45720"/>
+          </a:xfrm>
+          <a:prstGeom prst="rect">
+            <a:avLst/>
+          </a:prstGeom>
+          <a:solidFill>
+            <a:srgbClr val="06B6D4"/>
           </a:solidFill>
           <a:ln/>
         </p:spPr>
@@ -11844,6 +12271,69 @@
         </p:nvPicPr>
         <p:blipFill>
           <a:blip r:embed="rId3"/>
+          <a:srcRect l="0" r="0" t="0" b="0"/>
+          <a:stretch/>
+        </p:blipFill>
+        <p:spPr>
+          <a:xfrm>
+            <a:off x="4754880" y="2029968"/>
+            <a:ext cx="3977640" cy="2249424"/>
+          </a:xfrm>
+          <a:prstGeom prst="rect">
+            <a:avLst/>
+          </a:prstGeom>
+        </p:spPr>
+      </p:pic>
+      <p:sp>
+        <p:nvSpPr>
+          <p:cNvPr id="18" name="Shape 13"/>
+          <p:cNvSpPr/>
+          <p:nvPr/>
+        </p:nvSpPr>
+        <p:spPr>
+          <a:xfrm>
+            <a:off x="457200" y="4434840"/>
+            <a:ext cx="8229600" cy="502920"/>
+          </a:xfrm>
+          <a:prstGeom prst="rect">
+            <a:avLst/>
+          </a:prstGeom>
+          <a:solidFill>
+            <a:srgbClr val="F0FDF4"/>
+          </a:solidFill>
+          <a:ln/>
+        </p:spPr>
+      </p:sp>
+      <p:sp>
+        <p:nvSpPr>
+          <p:cNvPr id="19" name="Shape 14"/>
+          <p:cNvSpPr/>
+          <p:nvPr/>
+        </p:nvSpPr>
+        <p:spPr>
+          <a:xfrm>
+            <a:off x="457200" y="4434840"/>
+            <a:ext cx="54864" cy="502920"/>
+          </a:xfrm>
+          <a:prstGeom prst="rect">
+            <a:avLst/>
+          </a:prstGeom>
+          <a:solidFill>
+            <a:srgbClr val="10B981"/>
+          </a:solidFill>
+          <a:ln/>
+        </p:spPr>
+      </p:sp>
+      <p:pic>
+        <p:nvPicPr>
+          <p:cNvPr id="20" name="Image 3" descr="preencoded.png">    </p:cNvPr>
+          <p:cNvPicPr>
+            <a:picLocks noChangeAspect="1"/>
+          </p:cNvPicPr>
+          <p:nvPr/>
+        </p:nvPicPr>
+        <p:blipFill>
+          <a:blip r:embed="rId4"/>
           <a:stretch>
             <a:fillRect/>
           </a:stretch>
@@ -11860,7 +12350,7 @@
       </p:pic>
       <p:sp>
         <p:nvSpPr>
-          <p:cNvPr id="18" name="Text 13"/>
+          <p:cNvPr id="21" name="Text 15"/>
           <p:cNvSpPr/>
           <p:nvPr/>
         </p:nvSpPr>
@@ -12245,7 +12735,7 @@
         <p:spPr>
           <a:xfrm>
             <a:off x="457200" y="1965960"/>
-            <a:ext cx="2743200" cy="365760"/>
+            <a:ext cx="4023360" cy="347472"/>
           </a:xfrm>
           <a:prstGeom prst="rect">
             <a:avLst/>
@@ -12261,7 +12751,7 @@
               <a:buNone/>
             </a:pPr>
             <a:r>
-              <a:rPr lang="en-US" sz="1600" b="1" dirty="0">
+              <a:rPr lang="en-US" sz="1500" b="1" dirty="0">
                 <a:solidFill>
                   <a:srgbClr val="0F172A"/>
                 </a:solidFill>
@@ -12271,7 +12761,7 @@
               </a:rPr>
               <a:t>Key Concepts</a:t>
             </a:r>
-            <a:endParaRPr lang="en-US" sz="1600" dirty="0"/>
+            <a:endParaRPr lang="en-US" sz="1500" dirty="0"/>
           </a:p>
         </p:txBody>
       </p:sp>
@@ -12284,7 +12774,7 @@
         <p:spPr>
           <a:xfrm>
             <a:off x="457200" y="2331720"/>
-            <a:ext cx="8229600" cy="2011680"/>
+            <a:ext cx="4069080" cy="2011680"/>
           </a:xfrm>
           <a:prstGeom prst="rect">
             <a:avLst/>
@@ -12298,13 +12788,13 @@
           <a:p>
             <a:pPr marL="342900" indent="-342900">
               <a:spcAft>
-                <a:spcPts val="600"/>
+                <a:spcPts val="800"/>
               </a:spcAft>
               <a:buSzPct val="100000"/>
               <a:buChar char="●"/>
             </a:pPr>
             <a:r>
-              <a:rPr lang="en-US" sz="1300" dirty="0">
+              <a:rPr lang="en-US" sz="1200" dirty="0">
                 <a:solidFill>
                   <a:srgbClr val="1E293B"/>
                 </a:solidFill>
@@ -12314,18 +12804,18 @@
               </a:rPr>
               <a:t>Thought → Action → Observation loop (Yao et al., 2022)</a:t>
             </a:r>
-            <a:endParaRPr lang="en-US" sz="1300" dirty="0"/>
+            <a:endParaRPr lang="en-US" sz="1200" dirty="0"/>
           </a:p>
           <a:p>
             <a:pPr marL="342900" indent="-342900">
               <a:spcAft>
-                <a:spcPts val="600"/>
+                <a:spcPts val="800"/>
               </a:spcAft>
               <a:buSzPct val="100000"/>
               <a:buChar char="●"/>
             </a:pPr>
             <a:r>
-              <a:rPr lang="en-US" sz="1300" dirty="0">
+              <a:rPr lang="en-US" sz="1200" dirty="0">
                 <a:solidFill>
                   <a:srgbClr val="1E293B"/>
                 </a:solidFill>
@@ -12335,18 +12825,18 @@
               </a:rPr>
               <a:t>Multi-step problem solving with adaptive planning</a:t>
             </a:r>
-            <a:endParaRPr lang="en-US" sz="1300" dirty="0"/>
+            <a:endParaRPr lang="en-US" sz="1200" dirty="0"/>
           </a:p>
           <a:p>
             <a:pPr marL="342900" indent="-342900">
               <a:spcAft>
-                <a:spcPts val="600"/>
+                <a:spcPts val="800"/>
               </a:spcAft>
               <a:buSzPct val="100000"/>
               <a:buChar char="●"/>
             </a:pPr>
             <a:r>
-              <a:rPr lang="en-US" sz="1300" dirty="0">
+              <a:rPr lang="en-US" sz="1200" dirty="0">
                 <a:solidFill>
                   <a:srgbClr val="1E293B"/>
                 </a:solidFill>
@@ -12356,18 +12846,18 @@
               </a:rPr>
               <a:t>Error recovery: retry, fallback, reason about failures</a:t>
             </a:r>
-            <a:endParaRPr lang="en-US" sz="1300" dirty="0"/>
+            <a:endParaRPr lang="en-US" sz="1200" dirty="0"/>
           </a:p>
           <a:p>
             <a:pPr marL="342900" indent="-342900">
               <a:spcAft>
-                <a:spcPts val="600"/>
+                <a:spcPts val="800"/>
               </a:spcAft>
               <a:buSzPct val="100000"/>
               <a:buChar char="●"/>
             </a:pPr>
             <a:r>
-              <a:rPr lang="en-US" sz="1300" dirty="0">
+              <a:rPr lang="en-US" sz="1200" dirty="0">
                 <a:solidFill>
                   <a:srgbClr val="1E293B"/>
                 </a:solidFill>
@@ -12377,7 +12867,7 @@
               </a:rPr>
               <a:t>Foundation of EVERY modern AI agent</a:t>
             </a:r>
-            <a:endParaRPr lang="en-US" sz="1300" dirty="0"/>
+            <a:endParaRPr lang="en-US" sz="1200" dirty="0"/>
           </a:p>
         </p:txBody>
       </p:sp>
@@ -12389,16 +12879,23 @@
         </p:nvSpPr>
         <p:spPr>
           <a:xfrm>
-            <a:off x="457200" y="4434840"/>
-            <a:ext cx="8229600" cy="502920"/>
-          </a:xfrm>
-          <a:prstGeom prst="rect">
-            <a:avLst/>
-          </a:prstGeom>
-          <a:solidFill>
-            <a:srgbClr val="F0FDF4"/>
-          </a:solidFill>
-          <a:ln/>
+            <a:off x="4663440" y="1920240"/>
+            <a:ext cx="4160520" cy="2468880"/>
+          </a:xfrm>
+          <a:prstGeom prst="rect">
+            <a:avLst/>
+          </a:prstGeom>
+          <a:solidFill>
+            <a:srgbClr val="FFFFFF"/>
+          </a:solidFill>
+          <a:ln/>
+          <a:effectLst>
+            <a:outerShdw sx="100000" sy="100000" kx="0" ky="0" algn="bl" rotWithShape="0" blurRad="76200" dist="25400" dir="8100000">
+              <a:srgbClr val="000000">
+                <a:alpha val="12000"/>
+              </a:srgbClr>
+            </a:outerShdw>
+          </a:effectLst>
         </p:spPr>
       </p:sp>
       <p:sp>
@@ -12409,14 +12906,14 @@
         </p:nvSpPr>
         <p:spPr>
           <a:xfrm>
-            <a:off x="457200" y="4434840"/>
-            <a:ext cx="54864" cy="502920"/>
-          </a:xfrm>
-          <a:prstGeom prst="rect">
-            <a:avLst/>
-          </a:prstGeom>
-          <a:solidFill>
-            <a:srgbClr val="10B981"/>
+            <a:off x="4663440" y="1920240"/>
+            <a:ext cx="4160520" cy="45720"/>
+          </a:xfrm>
+          <a:prstGeom prst="rect">
+            <a:avLst/>
+          </a:prstGeom>
+          <a:solidFill>
+            <a:srgbClr val="06B6D4"/>
           </a:solidFill>
           <a:ln/>
         </p:spPr>
@@ -12431,6 +12928,69 @@
         </p:nvPicPr>
         <p:blipFill>
           <a:blip r:embed="rId3"/>
+          <a:srcRect l="0" r="0" t="0" b="0"/>
+          <a:stretch/>
+        </p:blipFill>
+        <p:spPr>
+          <a:xfrm>
+            <a:off x="4754880" y="2029968"/>
+            <a:ext cx="3977640" cy="2249424"/>
+          </a:xfrm>
+          <a:prstGeom prst="rect">
+            <a:avLst/>
+          </a:prstGeom>
+        </p:spPr>
+      </p:pic>
+      <p:sp>
+        <p:nvSpPr>
+          <p:cNvPr id="18" name="Shape 13"/>
+          <p:cNvSpPr/>
+          <p:nvPr/>
+        </p:nvSpPr>
+        <p:spPr>
+          <a:xfrm>
+            <a:off x="457200" y="4434840"/>
+            <a:ext cx="8229600" cy="502920"/>
+          </a:xfrm>
+          <a:prstGeom prst="rect">
+            <a:avLst/>
+          </a:prstGeom>
+          <a:solidFill>
+            <a:srgbClr val="F0FDF4"/>
+          </a:solidFill>
+          <a:ln/>
+        </p:spPr>
+      </p:sp>
+      <p:sp>
+        <p:nvSpPr>
+          <p:cNvPr id="19" name="Shape 14"/>
+          <p:cNvSpPr/>
+          <p:nvPr/>
+        </p:nvSpPr>
+        <p:spPr>
+          <a:xfrm>
+            <a:off x="457200" y="4434840"/>
+            <a:ext cx="54864" cy="502920"/>
+          </a:xfrm>
+          <a:prstGeom prst="rect">
+            <a:avLst/>
+          </a:prstGeom>
+          <a:solidFill>
+            <a:srgbClr val="10B981"/>
+          </a:solidFill>
+          <a:ln/>
+        </p:spPr>
+      </p:sp>
+      <p:pic>
+        <p:nvPicPr>
+          <p:cNvPr id="20" name="Image 3" descr="preencoded.png">    </p:cNvPr>
+          <p:cNvPicPr>
+            <a:picLocks noChangeAspect="1"/>
+          </p:cNvPicPr>
+          <p:nvPr/>
+        </p:nvPicPr>
+        <p:blipFill>
+          <a:blip r:embed="rId4"/>
           <a:stretch>
             <a:fillRect/>
           </a:stretch>
@@ -12447,7 +13007,7 @@
       </p:pic>
       <p:sp>
         <p:nvSpPr>
-          <p:cNvPr id="18" name="Text 13"/>
+          <p:cNvPr id="21" name="Text 15"/>
           <p:cNvSpPr/>
           <p:nvPr/>
         </p:nvSpPr>
